--- a/Pregrado/Trabajo de grado 2/Clases/Sesion 03 - Estructura del documento artículo de avance/Presentacion.pptx
+++ b/Pregrado/Trabajo de grado 2/Clases/Sesion 03 - Estructura del documento artículo de avance/Presentacion.pptx
@@ -3364,41 +3364,6 @@
           </a:p>
         </p:txBody>
       </p:sp>
-      <p:sp>
-        <p:nvSpPr>
-          <p:cNvPr id="7" name="TextBox 6"/>
-          <p:cNvSpPr txBox="1"/>
-          <p:nvPr/>
-        </p:nvSpPr>
-        <p:spPr>
-          <a:xfrm>
-            <a:off x="2194560" y="6446520"/>
-            <a:ext cx="5943600" cy="274320"/>
-          </a:xfrm>
-          <a:prstGeom prst="rect">
-            <a:avLst/>
-          </a:prstGeom>
-          <a:noFill/>
-        </p:spPr>
-        <p:txBody>
-          <a:bodyPr wrap="square" anchor="t" lIns="0" rIns="0" tIns="0" bIns="0">
-            <a:spAutoFit/>
-          </a:bodyPr>
-          <a:lstStyle/>
-          <a:p>
-            <a:pPr algn="l"/>
-            <a:r>
-              <a:rPr sz="1000" b="1" i="0">
-                <a:solidFill>
-                  <a:srgbClr val="8F989D"/>
-                </a:solidFill>
-                <a:latin typeface="Calibri"/>
-              </a:rPr>
-              <a:t>Inicio 5:10 pm</a:t>
-            </a:r>
-          </a:p>
-        </p:txBody>
-      </p:sp>
     </p:spTree>
   </p:cSld>
   <p:clrMapOvr>
@@ -3821,41 +3786,6 @@
         </p:nvSpPr>
         <p:spPr>
           <a:xfrm>
-            <a:off x="2194560" y="6446520"/>
-            <a:ext cx="5943600" cy="274320"/>
-          </a:xfrm>
-          <a:prstGeom prst="rect">
-            <a:avLst/>
-          </a:prstGeom>
-          <a:noFill/>
-        </p:spPr>
-        <p:txBody>
-          <a:bodyPr wrap="square" anchor="t" lIns="0" rIns="0" tIns="0" bIns="0">
-            <a:spAutoFit/>
-          </a:bodyPr>
-          <a:lstStyle/>
-          <a:p>
-            <a:pPr algn="l"/>
-            <a:r>
-              <a:rPr sz="1000" b="1" i="0">
-                <a:solidFill>
-                  <a:srgbClr val="8F989D"/>
-                </a:solidFill>
-                <a:latin typeface="Calibri"/>
-              </a:rPr>
-              <a:t>Inicio 5:10 pm</a:t>
-            </a:r>
-          </a:p>
-        </p:txBody>
-      </p:sp>
-      <p:sp>
-        <p:nvSpPr>
-          <p:cNvPr id="11" name="TextBox 10"/>
-          <p:cNvSpPr txBox="1"/>
-          <p:nvPr/>
-        </p:nvSpPr>
-        <p:spPr>
-          <a:xfrm>
             <a:off x="11094415" y="6446520"/>
             <a:ext cx="548640" cy="274320"/>
           </a:xfrm>
@@ -4099,41 +4029,6 @@
         </p:nvSpPr>
         <p:spPr>
           <a:xfrm>
-            <a:off x="2194560" y="6446520"/>
-            <a:ext cx="5943600" cy="274320"/>
-          </a:xfrm>
-          <a:prstGeom prst="rect">
-            <a:avLst/>
-          </a:prstGeom>
-          <a:noFill/>
-        </p:spPr>
-        <p:txBody>
-          <a:bodyPr wrap="square" anchor="t" lIns="0" rIns="0" tIns="0" bIns="0">
-            <a:spAutoFit/>
-          </a:bodyPr>
-          <a:lstStyle/>
-          <a:p>
-            <a:pPr algn="l"/>
-            <a:r>
-              <a:rPr sz="1000" b="1" i="0">
-                <a:solidFill>
-                  <a:srgbClr val="8F989D"/>
-                </a:solidFill>
-                <a:latin typeface="Calibri"/>
-              </a:rPr>
-              <a:t>Inicio 5:10 pm</a:t>
-            </a:r>
-          </a:p>
-        </p:txBody>
-      </p:sp>
-      <p:sp>
-        <p:nvSpPr>
-          <p:cNvPr id="7" name="TextBox 6"/>
-          <p:cNvSpPr txBox="1"/>
-          <p:nvPr/>
-        </p:nvSpPr>
-        <p:spPr>
-          <a:xfrm>
             <a:off x="11094415" y="6446520"/>
             <a:ext cx="548640" cy="274320"/>
           </a:xfrm>
@@ -4623,41 +4518,6 @@
         </p:nvSpPr>
         <p:spPr>
           <a:xfrm>
-            <a:off x="2194560" y="6446520"/>
-            <a:ext cx="5943600" cy="274320"/>
-          </a:xfrm>
-          <a:prstGeom prst="rect">
-            <a:avLst/>
-          </a:prstGeom>
-          <a:noFill/>
-        </p:spPr>
-        <p:txBody>
-          <a:bodyPr wrap="square" anchor="t" lIns="0" rIns="0" tIns="0" bIns="0">
-            <a:spAutoFit/>
-          </a:bodyPr>
-          <a:lstStyle/>
-          <a:p>
-            <a:pPr algn="l"/>
-            <a:r>
-              <a:rPr sz="1000" b="1" i="0">
-                <a:solidFill>
-                  <a:srgbClr val="8F989D"/>
-                </a:solidFill>
-                <a:latin typeface="Calibri"/>
-              </a:rPr>
-              <a:t>Inicio 5:10 pm</a:t>
-            </a:r>
-          </a:p>
-        </p:txBody>
-      </p:sp>
-      <p:sp>
-        <p:nvSpPr>
-          <p:cNvPr id="6" name="TextBox 5"/>
-          <p:cNvSpPr txBox="1"/>
-          <p:nvPr/>
-        </p:nvSpPr>
-        <p:spPr>
-          <a:xfrm>
             <a:off x="11094415" y="6446520"/>
             <a:ext cx="548640" cy="274320"/>
           </a:xfrm>
@@ -4687,7 +4547,7 @@
       </p:sp>
       <p:sp>
         <p:nvSpPr>
-          <p:cNvPr id="7" name="TextBox 6"/>
+          <p:cNvPr id="6" name="TextBox 5"/>
           <p:cNvSpPr txBox="1"/>
           <p:nvPr/>
         </p:nvSpPr>
@@ -5276,41 +5136,6 @@
         </p:nvSpPr>
         <p:spPr>
           <a:xfrm>
-            <a:off x="2194560" y="6446520"/>
-            <a:ext cx="5943600" cy="274320"/>
-          </a:xfrm>
-          <a:prstGeom prst="rect">
-            <a:avLst/>
-          </a:prstGeom>
-          <a:noFill/>
-        </p:spPr>
-        <p:txBody>
-          <a:bodyPr wrap="square" anchor="t" lIns="0" rIns="0" tIns="0" bIns="0">
-            <a:spAutoFit/>
-          </a:bodyPr>
-          <a:lstStyle/>
-          <a:p>
-            <a:pPr algn="l"/>
-            <a:r>
-              <a:rPr sz="1000" b="1" i="0">
-                <a:solidFill>
-                  <a:srgbClr val="8F989D"/>
-                </a:solidFill>
-                <a:latin typeface="Calibri"/>
-              </a:rPr>
-              <a:t>Inicio 5:10 pm</a:t>
-            </a:r>
-          </a:p>
-        </p:txBody>
-      </p:sp>
-      <p:sp>
-        <p:nvSpPr>
-          <p:cNvPr id="7" name="TextBox 6"/>
-          <p:cNvSpPr txBox="1"/>
-          <p:nvPr/>
-        </p:nvSpPr>
-        <p:spPr>
-          <a:xfrm>
             <a:off x="11094415" y="6446520"/>
             <a:ext cx="548640" cy="274320"/>
           </a:xfrm>
@@ -5782,41 +5607,6 @@
         </p:nvSpPr>
         <p:spPr>
           <a:xfrm>
-            <a:off x="2194560" y="6446520"/>
-            <a:ext cx="5943600" cy="274320"/>
-          </a:xfrm>
-          <a:prstGeom prst="rect">
-            <a:avLst/>
-          </a:prstGeom>
-          <a:noFill/>
-        </p:spPr>
-        <p:txBody>
-          <a:bodyPr wrap="square" anchor="t" lIns="0" rIns="0" tIns="0" bIns="0">
-            <a:spAutoFit/>
-          </a:bodyPr>
-          <a:lstStyle/>
-          <a:p>
-            <a:pPr algn="l"/>
-            <a:r>
-              <a:rPr sz="1000" b="1" i="0">
-                <a:solidFill>
-                  <a:srgbClr val="8F989D"/>
-                </a:solidFill>
-                <a:latin typeface="Calibri"/>
-              </a:rPr>
-              <a:t>Inicio 5:10 pm</a:t>
-            </a:r>
-          </a:p>
-        </p:txBody>
-      </p:sp>
-      <p:sp>
-        <p:nvSpPr>
-          <p:cNvPr id="6" name="TextBox 5"/>
-          <p:cNvSpPr txBox="1"/>
-          <p:nvPr/>
-        </p:nvSpPr>
-        <p:spPr>
-          <a:xfrm>
             <a:off x="11094415" y="6446520"/>
             <a:ext cx="548640" cy="274320"/>
           </a:xfrm>
@@ -6126,41 +5916,6 @@
         </p:nvSpPr>
         <p:spPr>
           <a:xfrm>
-            <a:off x="2194560" y="6446520"/>
-            <a:ext cx="5943600" cy="274320"/>
-          </a:xfrm>
-          <a:prstGeom prst="rect">
-            <a:avLst/>
-          </a:prstGeom>
-          <a:noFill/>
-        </p:spPr>
-        <p:txBody>
-          <a:bodyPr wrap="square" anchor="t" lIns="0" rIns="0" tIns="0" bIns="0">
-            <a:spAutoFit/>
-          </a:bodyPr>
-          <a:lstStyle/>
-          <a:p>
-            <a:pPr algn="l"/>
-            <a:r>
-              <a:rPr sz="1000" b="1" i="0">
-                <a:solidFill>
-                  <a:srgbClr val="8F989D"/>
-                </a:solidFill>
-                <a:latin typeface="Calibri"/>
-              </a:rPr>
-              <a:t>Inicio 5:10 pm</a:t>
-            </a:r>
-          </a:p>
-        </p:txBody>
-      </p:sp>
-      <p:sp>
-        <p:nvSpPr>
-          <p:cNvPr id="6" name="TextBox 5"/>
-          <p:cNvSpPr txBox="1"/>
-          <p:nvPr/>
-        </p:nvSpPr>
-        <p:spPr>
-          <a:xfrm>
             <a:off x="11094415" y="6446520"/>
             <a:ext cx="548640" cy="274320"/>
           </a:xfrm>
@@ -6562,41 +6317,6 @@
         </p:nvSpPr>
         <p:spPr>
           <a:xfrm>
-            <a:off x="2194560" y="6446520"/>
-            <a:ext cx="5943600" cy="274320"/>
-          </a:xfrm>
-          <a:prstGeom prst="rect">
-            <a:avLst/>
-          </a:prstGeom>
-          <a:noFill/>
-        </p:spPr>
-        <p:txBody>
-          <a:bodyPr wrap="square" anchor="t" lIns="0" rIns="0" tIns="0" bIns="0">
-            <a:spAutoFit/>
-          </a:bodyPr>
-          <a:lstStyle/>
-          <a:p>
-            <a:pPr algn="l"/>
-            <a:r>
-              <a:rPr sz="1000" b="1" i="0">
-                <a:solidFill>
-                  <a:srgbClr val="8F989D"/>
-                </a:solidFill>
-                <a:latin typeface="Calibri"/>
-              </a:rPr>
-              <a:t>Inicio 5:10 pm</a:t>
-            </a:r>
-          </a:p>
-        </p:txBody>
-      </p:sp>
-      <p:sp>
-        <p:nvSpPr>
-          <p:cNvPr id="6" name="TextBox 5"/>
-          <p:cNvSpPr txBox="1"/>
-          <p:nvPr/>
-        </p:nvSpPr>
-        <p:spPr>
-          <a:xfrm>
             <a:off x="11094415" y="6446520"/>
             <a:ext cx="548640" cy="274320"/>
           </a:xfrm>
@@ -6843,41 +6563,6 @@
           </a:p>
         </p:txBody>
       </p:sp>
-      <p:sp>
-        <p:nvSpPr>
-          <p:cNvPr id="7" name="TextBox 6"/>
-          <p:cNvSpPr txBox="1"/>
-          <p:nvPr/>
-        </p:nvSpPr>
-        <p:spPr>
-          <a:xfrm>
-            <a:off x="2194560" y="6446520"/>
-            <a:ext cx="5943600" cy="274320"/>
-          </a:xfrm>
-          <a:prstGeom prst="rect">
-            <a:avLst/>
-          </a:prstGeom>
-          <a:noFill/>
-        </p:spPr>
-        <p:txBody>
-          <a:bodyPr wrap="square" anchor="t" lIns="0" rIns="0" tIns="0" bIns="0">
-            <a:spAutoFit/>
-          </a:bodyPr>
-          <a:lstStyle/>
-          <a:p>
-            <a:pPr algn="l"/>
-            <a:r>
-              <a:rPr sz="1000" b="1" i="0">
-                <a:solidFill>
-                  <a:srgbClr val="8F989D"/>
-                </a:solidFill>
-                <a:latin typeface="Calibri"/>
-              </a:rPr>
-              <a:t>Inicio 5:10 pm</a:t>
-            </a:r>
-          </a:p>
-        </p:txBody>
-      </p:sp>
     </p:spTree>
   </p:cSld>
   <p:clrMapOvr>
@@ -7234,41 +6919,6 @@
         </p:nvSpPr>
         <p:spPr>
           <a:xfrm>
-            <a:off x="2194560" y="6446520"/>
-            <a:ext cx="5943600" cy="274320"/>
-          </a:xfrm>
-          <a:prstGeom prst="rect">
-            <a:avLst/>
-          </a:prstGeom>
-          <a:noFill/>
-        </p:spPr>
-        <p:txBody>
-          <a:bodyPr wrap="square" anchor="t" lIns="0" rIns="0" tIns="0" bIns="0">
-            <a:spAutoFit/>
-          </a:bodyPr>
-          <a:lstStyle/>
-          <a:p>
-            <a:pPr algn="l"/>
-            <a:r>
-              <a:rPr sz="1000" b="1" i="0">
-                <a:solidFill>
-                  <a:srgbClr val="8F989D"/>
-                </a:solidFill>
-                <a:latin typeface="Calibri"/>
-              </a:rPr>
-              <a:t>Inicio 5:10 pm</a:t>
-            </a:r>
-          </a:p>
-        </p:txBody>
-      </p:sp>
-      <p:sp>
-        <p:nvSpPr>
-          <p:cNvPr id="6" name="TextBox 5"/>
-          <p:cNvSpPr txBox="1"/>
-          <p:nvPr/>
-        </p:nvSpPr>
-        <p:spPr>
-          <a:xfrm>
             <a:off x="11094415" y="6446520"/>
             <a:ext cx="548640" cy="274320"/>
           </a:xfrm>
@@ -7298,7 +6948,7 @@
       </p:sp>
       <p:sp>
         <p:nvSpPr>
-          <p:cNvPr id="7" name="TextBox 6"/>
+          <p:cNvPr id="6" name="TextBox 5"/>
           <p:cNvSpPr txBox="1"/>
           <p:nvPr/>
         </p:nvSpPr>
@@ -7731,41 +7381,6 @@
       <p:sp>
         <p:nvSpPr>
           <p:cNvPr id="5" name="TextBox 4"/>
-          <p:cNvSpPr txBox="1"/>
-          <p:nvPr/>
-        </p:nvSpPr>
-        <p:spPr>
-          <a:xfrm>
-            <a:off x="2194560" y="6446520"/>
-            <a:ext cx="5943600" cy="274320"/>
-          </a:xfrm>
-          <a:prstGeom prst="rect">
-            <a:avLst/>
-          </a:prstGeom>
-          <a:noFill/>
-        </p:spPr>
-        <p:txBody>
-          <a:bodyPr wrap="square" anchor="t" lIns="0" rIns="0" tIns="0" bIns="0">
-            <a:spAutoFit/>
-          </a:bodyPr>
-          <a:lstStyle/>
-          <a:p>
-            <a:pPr algn="l"/>
-            <a:r>
-              <a:rPr sz="1000" b="1" i="0">
-                <a:solidFill>
-                  <a:srgbClr val="8F989D"/>
-                </a:solidFill>
-                <a:latin typeface="Calibri"/>
-              </a:rPr>
-              <a:t>Inicio 5:10 pm</a:t>
-            </a:r>
-          </a:p>
-        </p:txBody>
-      </p:sp>
-      <p:sp>
-        <p:nvSpPr>
-          <p:cNvPr id="6" name="TextBox 5"/>
           <p:cNvSpPr txBox="1"/>
           <p:nvPr/>
         </p:nvSpPr>
@@ -8478,41 +8093,6 @@
         </p:nvSpPr>
         <p:spPr>
           <a:xfrm>
-            <a:off x="2194560" y="6446520"/>
-            <a:ext cx="5943600" cy="274320"/>
-          </a:xfrm>
-          <a:prstGeom prst="rect">
-            <a:avLst/>
-          </a:prstGeom>
-          <a:noFill/>
-        </p:spPr>
-        <p:txBody>
-          <a:bodyPr wrap="square" anchor="t" lIns="0" rIns="0" tIns="0" bIns="0">
-            <a:spAutoFit/>
-          </a:bodyPr>
-          <a:lstStyle/>
-          <a:p>
-            <a:pPr algn="l"/>
-            <a:r>
-              <a:rPr sz="1000" b="1" i="0">
-                <a:solidFill>
-                  <a:srgbClr val="8F989D"/>
-                </a:solidFill>
-                <a:latin typeface="Calibri"/>
-              </a:rPr>
-              <a:t>Inicio 5:10 pm</a:t>
-            </a:r>
-          </a:p>
-        </p:txBody>
-      </p:sp>
-      <p:sp>
-        <p:nvSpPr>
-          <p:cNvPr id="7" name="TextBox 6"/>
-          <p:cNvSpPr txBox="1"/>
-          <p:nvPr/>
-        </p:nvSpPr>
-        <p:spPr>
-          <a:xfrm>
             <a:off x="11094415" y="6446520"/>
             <a:ext cx="548640" cy="274320"/>
           </a:xfrm>
@@ -8876,41 +8456,6 @@
         </p:nvSpPr>
         <p:spPr>
           <a:xfrm>
-            <a:off x="2194560" y="6446520"/>
-            <a:ext cx="5943600" cy="274320"/>
-          </a:xfrm>
-          <a:prstGeom prst="rect">
-            <a:avLst/>
-          </a:prstGeom>
-          <a:noFill/>
-        </p:spPr>
-        <p:txBody>
-          <a:bodyPr wrap="square" anchor="t" lIns="0" rIns="0" tIns="0" bIns="0">
-            <a:spAutoFit/>
-          </a:bodyPr>
-          <a:lstStyle/>
-          <a:p>
-            <a:pPr algn="l"/>
-            <a:r>
-              <a:rPr sz="1000" b="1" i="0">
-                <a:solidFill>
-                  <a:srgbClr val="8F989D"/>
-                </a:solidFill>
-                <a:latin typeface="Calibri"/>
-              </a:rPr>
-              <a:t>Inicio 5:10 pm</a:t>
-            </a:r>
-          </a:p>
-        </p:txBody>
-      </p:sp>
-      <p:sp>
-        <p:nvSpPr>
-          <p:cNvPr id="6" name="TextBox 5"/>
-          <p:cNvSpPr txBox="1"/>
-          <p:nvPr/>
-        </p:nvSpPr>
-        <p:spPr>
-          <a:xfrm>
             <a:off x="11094415" y="6446520"/>
             <a:ext cx="548640" cy="274320"/>
           </a:xfrm>
@@ -9269,41 +8814,6 @@
       <p:sp>
         <p:nvSpPr>
           <p:cNvPr id="5" name="TextBox 4"/>
-          <p:cNvSpPr txBox="1"/>
-          <p:nvPr/>
-        </p:nvSpPr>
-        <p:spPr>
-          <a:xfrm>
-            <a:off x="2194560" y="6446520"/>
-            <a:ext cx="5943600" cy="274320"/>
-          </a:xfrm>
-          <a:prstGeom prst="rect">
-            <a:avLst/>
-          </a:prstGeom>
-          <a:noFill/>
-        </p:spPr>
-        <p:txBody>
-          <a:bodyPr wrap="square" anchor="t" lIns="0" rIns="0" tIns="0" bIns="0">
-            <a:spAutoFit/>
-          </a:bodyPr>
-          <a:lstStyle/>
-          <a:p>
-            <a:pPr algn="l"/>
-            <a:r>
-              <a:rPr sz="1000" b="1" i="0">
-                <a:solidFill>
-                  <a:srgbClr val="8F989D"/>
-                </a:solidFill>
-                <a:latin typeface="Calibri"/>
-              </a:rPr>
-              <a:t>Inicio 5:10 pm</a:t>
-            </a:r>
-          </a:p>
-        </p:txBody>
-      </p:sp>
-      <p:sp>
-        <p:nvSpPr>
-          <p:cNvPr id="6" name="TextBox 5"/>
           <p:cNvSpPr txBox="1"/>
           <p:nvPr/>
         </p:nvSpPr>
@@ -9797,41 +9307,6 @@
         </p:nvSpPr>
         <p:spPr>
           <a:xfrm>
-            <a:off x="2194560" y="6446520"/>
-            <a:ext cx="5943600" cy="274320"/>
-          </a:xfrm>
-          <a:prstGeom prst="rect">
-            <a:avLst/>
-          </a:prstGeom>
-          <a:noFill/>
-        </p:spPr>
-        <p:txBody>
-          <a:bodyPr wrap="square" anchor="t" lIns="0" rIns="0" tIns="0" bIns="0">
-            <a:spAutoFit/>
-          </a:bodyPr>
-          <a:lstStyle/>
-          <a:p>
-            <a:pPr algn="l"/>
-            <a:r>
-              <a:rPr sz="1000" b="1" i="0">
-                <a:solidFill>
-                  <a:srgbClr val="8F989D"/>
-                </a:solidFill>
-                <a:latin typeface="Calibri"/>
-              </a:rPr>
-              <a:t>Inicio 5:10 pm</a:t>
-            </a:r>
-          </a:p>
-        </p:txBody>
-      </p:sp>
-      <p:sp>
-        <p:nvSpPr>
-          <p:cNvPr id="7" name="TextBox 6"/>
-          <p:cNvSpPr txBox="1"/>
-          <p:nvPr/>
-        </p:nvSpPr>
-        <p:spPr>
-          <a:xfrm>
             <a:off x="11094415" y="6446520"/>
             <a:ext cx="548640" cy="274320"/>
           </a:xfrm>
@@ -10197,41 +9672,6 @@
         </p:nvSpPr>
         <p:spPr>
           <a:xfrm>
-            <a:off x="2194560" y="6446520"/>
-            <a:ext cx="5943600" cy="274320"/>
-          </a:xfrm>
-          <a:prstGeom prst="rect">
-            <a:avLst/>
-          </a:prstGeom>
-          <a:noFill/>
-        </p:spPr>
-        <p:txBody>
-          <a:bodyPr wrap="square" anchor="t" lIns="0" rIns="0" tIns="0" bIns="0">
-            <a:spAutoFit/>
-          </a:bodyPr>
-          <a:lstStyle/>
-          <a:p>
-            <a:pPr algn="l"/>
-            <a:r>
-              <a:rPr sz="1000" b="1" i="0">
-                <a:solidFill>
-                  <a:srgbClr val="8F989D"/>
-                </a:solidFill>
-                <a:latin typeface="Calibri"/>
-              </a:rPr>
-              <a:t>Inicio 5:10 pm</a:t>
-            </a:r>
-          </a:p>
-        </p:txBody>
-      </p:sp>
-      <p:sp>
-        <p:nvSpPr>
-          <p:cNvPr id="6" name="TextBox 5"/>
-          <p:cNvSpPr txBox="1"/>
-          <p:nvPr/>
-        </p:nvSpPr>
-        <p:spPr>
-          <a:xfrm>
             <a:off x="11094415" y="6446520"/>
             <a:ext cx="548640" cy="274320"/>
           </a:xfrm>
@@ -10669,41 +10109,6 @@
         </p:nvSpPr>
         <p:spPr>
           <a:xfrm>
-            <a:off x="2194560" y="6446520"/>
-            <a:ext cx="5943600" cy="274320"/>
-          </a:xfrm>
-          <a:prstGeom prst="rect">
-            <a:avLst/>
-          </a:prstGeom>
-          <a:noFill/>
-        </p:spPr>
-        <p:txBody>
-          <a:bodyPr wrap="square" anchor="t" lIns="0" rIns="0" tIns="0" bIns="0">
-            <a:spAutoFit/>
-          </a:bodyPr>
-          <a:lstStyle/>
-          <a:p>
-            <a:pPr algn="l"/>
-            <a:r>
-              <a:rPr sz="1000" b="1" i="0">
-                <a:solidFill>
-                  <a:srgbClr val="8F989D"/>
-                </a:solidFill>
-                <a:latin typeface="Calibri"/>
-              </a:rPr>
-              <a:t>Inicio 5:10 pm</a:t>
-            </a:r>
-          </a:p>
-        </p:txBody>
-      </p:sp>
-      <p:sp>
-        <p:nvSpPr>
-          <p:cNvPr id="6" name="TextBox 5"/>
-          <p:cNvSpPr txBox="1"/>
-          <p:nvPr/>
-        </p:nvSpPr>
-        <p:spPr>
-          <a:xfrm>
             <a:off x="11094415" y="6446520"/>
             <a:ext cx="548640" cy="274320"/>
           </a:xfrm>
@@ -10733,7 +10138,7 @@
       </p:sp>
       <p:sp>
         <p:nvSpPr>
-          <p:cNvPr id="7" name="TextBox 6"/>
+          <p:cNvPr id="6" name="TextBox 5"/>
           <p:cNvSpPr txBox="1"/>
           <p:nvPr/>
         </p:nvSpPr>
